--- a/public/fun/cards/office/office-07.pptx
+++ b/public/fun/cards/office/office-07.pptx
@@ -3099,23 +3099,23 @@
       <p:grpSpPr/>
       <p:sp>
         <p:nvSpPr>
-          <p:cNvPr id="2" name="Rectangle 1"/>
+          <p:cNvPr id="2" name="Oval 1"/>
           <p:cNvSpPr/>
           <p:nvPr/>
         </p:nvSpPr>
         <p:spPr>
           <a:xfrm>
-            <a:off x="93600" y="93600"/>
-            <a:ext cx="3052800" cy="1612800"/>
+            <a:off x="547200" y="475200"/>
+            <a:ext cx="849600" cy="849600"/>
           </a:xfrm>
-          <a:prstGeom prst="rect">
+          <a:prstGeom prst="ellipse">
             <a:avLst/>
           </a:prstGeom>
-          <a:noFill/>
-          <a:ln w="10800">
-            <a:solidFill>
-              <a:srgbClr val="BD4298"/>
-            </a:solidFill>
+          <a:solidFill>
+            <a:srgbClr val="DBF7F0"/>
+          </a:solidFill>
+          <a:ln>
+            <a:noFill/>
           </a:ln>
         </p:spPr>
         <p:txBody>
@@ -3128,23 +3128,25 @@
       </p:sp>
       <p:sp>
         <p:nvSpPr>
-          <p:cNvPr id="3" name="Rectangle 2"/>
+          <p:cNvPr id="3" name="Oval 2"/>
           <p:cNvSpPr/>
           <p:nvPr/>
         </p:nvSpPr>
         <p:spPr>
           <a:xfrm>
-            <a:off x="144000" y="144000"/>
-            <a:ext cx="2952000" cy="1512000"/>
+            <a:off x="187200" y="475200"/>
+            <a:ext cx="849600" cy="849600"/>
           </a:xfrm>
-          <a:prstGeom prst="rect">
+          <a:prstGeom prst="ellipse">
             <a:avLst/>
           </a:prstGeom>
-          <a:noFill/>
-          <a:ln w="5400">
-            <a:solidFill>
-              <a:srgbClr val="F1D0E7"/>
-            </a:solidFill>
+          <a:solidFill>
+            <a:srgbClr val="00C896">
+              <a:alpha val="92000"/>
+            </a:srgbClr>
+          </a:solidFill>
+          <a:ln>
+            <a:noFill/>
           </a:ln>
         </p:spPr>
         <p:txBody>
@@ -3163,8 +3165,8 @@
         </p:nvSpPr>
         <p:spPr>
           <a:xfrm>
-            <a:off x="360000" y="280800"/>
-            <a:ext cx="2520000" cy="100800"/>
+            <a:off x="1692000" y="223200"/>
+            <a:ext cx="1296000" cy="133351"/>
           </a:xfrm>
           <a:prstGeom prst="rect">
             <a:avLst/>
@@ -3177,15 +3179,15 @@
           </a:bodyPr>
           <a:lstStyle/>
           <a:p>
-            <a:pPr algn="ctr">
+            <a:pPr algn="l">
               <a:lnSpc>
                 <a:spcPts val="1015"/>
               </a:lnSpc>
             </a:pPr>
             <a:r>
-              <a:rPr sz="700" b="1" spc="400">
+              <a:rPr sz="700" b="1" spc="200">
                 <a:solidFill>
-                  <a:srgbClr val="936885"/>
+                  <a:srgbClr val="6B7280"/>
                 </a:solidFill>
                 <a:latin typeface="맑은 고딕"/>
                 <a:ea typeface="맑은 고딕"/>
@@ -3203,8 +3205,8 @@
         </p:nvSpPr>
         <p:spPr>
           <a:xfrm>
-            <a:off x="360000" y="468000"/>
-            <a:ext cx="2520000" cy="313692"/>
+            <a:off x="1692000" y="540000"/>
+            <a:ext cx="1368000" cy="360000"/>
           </a:xfrm>
           <a:prstGeom prst="rect">
             <a:avLst/>
@@ -3217,18 +3219,18 @@
           </a:bodyPr>
           <a:lstStyle/>
           <a:p>
-            <a:pPr algn="ctr">
+            <a:pPr algn="l">
               <a:lnSpc>
-                <a:spcPts val="2755"/>
+                <a:spcPts val="3190"/>
               </a:lnSpc>
             </a:pPr>
             <a:r>
-              <a:rPr sz="1900" b="1" spc="50">
+              <a:rPr sz="2200" b="1">
                 <a:solidFill>
-                  <a:srgbClr val="71285B"/>
+                  <a:srgbClr val="12151C"/>
                 </a:solidFill>
-                <a:latin typeface="바탕"/>
-                <a:ea typeface="바탕"/>
+                <a:latin typeface="맑은 고딕"/>
+                <a:ea typeface="맑은 고딕"/>
               </a:rPr>
               <a:t>조하린</a:t>
             </a:r>
@@ -3243,8 +3245,8 @@
         </p:nvSpPr>
         <p:spPr>
           <a:xfrm>
-            <a:off x="360000" y="784800"/>
-            <a:ext cx="2520000" cy="122400"/>
+            <a:off x="1692000" y="943200"/>
+            <a:ext cx="1368000" cy="171451"/>
           </a:xfrm>
           <a:prstGeom prst="rect">
             <a:avLst/>
@@ -3257,15 +3259,15 @@
           </a:bodyPr>
           <a:lstStyle/>
           <a:p>
-            <a:pPr algn="ctr">
+            <a:pPr algn="l">
               <a:lnSpc>
-                <a:spcPts val="1232"/>
+                <a:spcPts val="1305"/>
               </a:lnSpc>
             </a:pPr>
             <a:r>
-              <a:rPr sz="850" b="1">
+              <a:rPr sz="900" b="0">
                 <a:solidFill>
-                  <a:srgbClr val="BD4298"/>
+                  <a:srgbClr val="6B7280"/>
                 </a:solidFill>
                 <a:latin typeface="맑은 고딕"/>
                 <a:ea typeface="맑은 고딕"/>
@@ -3283,14 +3285,14 @@
         </p:nvSpPr>
         <p:spPr>
           <a:xfrm>
-            <a:off x="1530000" y="993600"/>
-            <a:ext cx="180000" cy="10800"/>
+            <a:off x="1692000" y="1195200"/>
+            <a:ext cx="144000" cy="18000"/>
           </a:xfrm>
           <a:prstGeom prst="rect">
             <a:avLst/>
           </a:prstGeom>
           <a:solidFill>
-            <a:srgbClr val="BD4298"/>
+            <a:srgbClr val="00C896"/>
           </a:solidFill>
           <a:ln>
             <a:noFill/>
@@ -3312,8 +3314,8 @@
         </p:nvSpPr>
         <p:spPr>
           <a:xfrm>
-            <a:off x="360000" y="1087200"/>
-            <a:ext cx="2520000" cy="108000"/>
+            <a:off x="1692000" y="1328400"/>
+            <a:ext cx="331200" cy="99061"/>
           </a:xfrm>
           <a:prstGeom prst="rect">
             <a:avLst/>
@@ -3326,20 +3328,20 @@
           </a:bodyPr>
           <a:lstStyle/>
           <a:p>
-            <a:pPr algn="ctr">
+            <a:pPr algn="l">
               <a:lnSpc>
-                <a:spcPts val="1087"/>
+                <a:spcPts val="754"/>
               </a:lnSpc>
             </a:pPr>
             <a:r>
-              <a:rPr sz="750" b="0">
+              <a:rPr sz="520" b="1" spc="120">
                 <a:solidFill>
-                  <a:srgbClr val="71285B"/>
+                  <a:srgbClr val="6B7280"/>
                 </a:solidFill>
                 <a:latin typeface="맑은 고딕"/>
                 <a:ea typeface="맑은 고딕"/>
               </a:rPr>
-              <a:t>010-1234-5678</a:t>
+              <a:t>TEL</a:t>
             </a:r>
           </a:p>
         </p:txBody>
@@ -3352,8 +3354,8 @@
         </p:nvSpPr>
         <p:spPr>
           <a:xfrm>
-            <a:off x="360000" y="1209600"/>
-            <a:ext cx="2520000" cy="108000"/>
+            <a:off x="2023200" y="1317600"/>
+            <a:ext cx="1188000" cy="125731"/>
           </a:xfrm>
           <a:prstGeom prst="rect">
             <a:avLst/>
@@ -3366,20 +3368,20 @@
           </a:bodyPr>
           <a:lstStyle/>
           <a:p>
-            <a:pPr algn="ctr">
+            <a:pPr algn="l">
               <a:lnSpc>
-                <a:spcPts val="1087"/>
+                <a:spcPts val="956"/>
               </a:lnSpc>
             </a:pPr>
             <a:r>
-              <a:rPr sz="750" b="0">
+              <a:rPr sz="660" b="0">
                 <a:solidFill>
-                  <a:srgbClr val="71285B"/>
+                  <a:srgbClr val="12151C"/>
                 </a:solidFill>
                 <a:latin typeface="맑은 고딕"/>
                 <a:ea typeface="맑은 고딕"/>
               </a:rPr>
-              <a:t>name@example.com</a:t>
+              <a:t>010-1234-5678</a:t>
             </a:r>
           </a:p>
         </p:txBody>
@@ -3392,8 +3394,8 @@
         </p:nvSpPr>
         <p:spPr>
           <a:xfrm>
-            <a:off x="360000" y="1332000"/>
-            <a:ext cx="2520000" cy="108000"/>
+            <a:off x="1692000" y="1458000"/>
+            <a:ext cx="331200" cy="99061"/>
           </a:xfrm>
           <a:prstGeom prst="rect">
             <a:avLst/>
@@ -3406,112 +3408,141 @@
           </a:bodyPr>
           <a:lstStyle/>
           <a:p>
-            <a:pPr algn="ctr">
+            <a:pPr algn="l">
               <a:lnSpc>
-                <a:spcPts val="1015"/>
+                <a:spcPts val="754"/>
               </a:lnSpc>
             </a:pPr>
             <a:r>
-              <a:rPr sz="700" b="0">
+              <a:rPr sz="520" b="1" spc="120">
                 <a:solidFill>
-                  <a:srgbClr val="936885"/>
+                  <a:srgbClr val="6B7280"/>
+                </a:solidFill>
+                <a:latin typeface="맑은 고딕"/>
+                <a:ea typeface="맑은 고딕"/>
+              </a:rPr>
+              <a:t>MAIL</a:t>
+            </a:r>
+          </a:p>
+        </p:txBody>
+      </p:sp>
+      <p:sp>
+        <p:nvSpPr>
+          <p:cNvPr id="11" name="텍스트"/>
+          <p:cNvSpPr txBox="1"/>
+          <p:nvPr/>
+        </p:nvSpPr>
+        <p:spPr>
+          <a:xfrm>
+            <a:off x="2023200" y="1447200"/>
+            <a:ext cx="1188000" cy="125731"/>
+          </a:xfrm>
+          <a:prstGeom prst="rect">
+            <a:avLst/>
+          </a:prstGeom>
+          <a:noFill/>
+        </p:spPr>
+        <p:txBody>
+          <a:bodyPr wrap="square" lIns="0" rIns="0" tIns="0" bIns="0" anchor="t">
+            <a:spAutoFit/>
+          </a:bodyPr>
+          <a:lstStyle/>
+          <a:p>
+            <a:pPr algn="l">
+              <a:lnSpc>
+                <a:spcPts val="956"/>
+              </a:lnSpc>
+            </a:pPr>
+            <a:r>
+              <a:rPr sz="660" b="0">
+                <a:solidFill>
+                  <a:srgbClr val="12151C"/>
+                </a:solidFill>
+                <a:latin typeface="맑은 고딕"/>
+                <a:ea typeface="맑은 고딕"/>
+              </a:rPr>
+              <a:t>name@example.com</a:t>
+            </a:r>
+          </a:p>
+        </p:txBody>
+      </p:sp>
+      <p:sp>
+        <p:nvSpPr>
+          <p:cNvPr id="12" name="텍스트"/>
+          <p:cNvSpPr txBox="1"/>
+          <p:nvPr/>
+        </p:nvSpPr>
+        <p:spPr>
+          <a:xfrm>
+            <a:off x="1692000" y="1587600"/>
+            <a:ext cx="331200" cy="99061"/>
+          </a:xfrm>
+          <a:prstGeom prst="rect">
+            <a:avLst/>
+          </a:prstGeom>
+          <a:noFill/>
+        </p:spPr>
+        <p:txBody>
+          <a:bodyPr wrap="square" lIns="0" rIns="0" tIns="0" bIns="0" anchor="t">
+            <a:spAutoFit/>
+          </a:bodyPr>
+          <a:lstStyle/>
+          <a:p>
+            <a:pPr algn="l">
+              <a:lnSpc>
+                <a:spcPts val="754"/>
+              </a:lnSpc>
+            </a:pPr>
+            <a:r>
+              <a:rPr sz="520" b="1" spc="120">
+                <a:solidFill>
+                  <a:srgbClr val="6B7280"/>
+                </a:solidFill>
+                <a:latin typeface="맑은 고딕"/>
+                <a:ea typeface="맑은 고딕"/>
+              </a:rPr>
+              <a:t>ADDR</a:t>
+            </a:r>
+          </a:p>
+        </p:txBody>
+      </p:sp>
+      <p:sp>
+        <p:nvSpPr>
+          <p:cNvPr id="13" name="텍스트"/>
+          <p:cNvSpPr txBox="1"/>
+          <p:nvPr/>
+        </p:nvSpPr>
+        <p:spPr>
+          <a:xfrm>
+            <a:off x="2023200" y="1576800"/>
+            <a:ext cx="1188000" cy="125731"/>
+          </a:xfrm>
+          <a:prstGeom prst="rect">
+            <a:avLst/>
+          </a:prstGeom>
+          <a:noFill/>
+        </p:spPr>
+        <p:txBody>
+          <a:bodyPr wrap="square" lIns="0" rIns="0" tIns="0" bIns="0" anchor="t">
+            <a:spAutoFit/>
+          </a:bodyPr>
+          <a:lstStyle/>
+          <a:p>
+            <a:pPr algn="l">
+              <a:lnSpc>
+                <a:spcPts val="956"/>
+              </a:lnSpc>
+            </a:pPr>
+            <a:r>
+              <a:rPr sz="660" b="0">
+                <a:solidFill>
+                  <a:srgbClr val="12151C"/>
                 </a:solidFill>
                 <a:latin typeface="맑은 고딕"/>
                 <a:ea typeface="맑은 고딕"/>
               </a:rPr>
               <a:t>주소를 입력해 주세요</a:t>
             </a:r>
-          </a:p>
-        </p:txBody>
-      </p:sp>
-      <p:sp>
-        <p:nvSpPr>
-          <p:cNvPr id="11" name="Oval 10"/>
-          <p:cNvSpPr/>
-          <p:nvPr/>
-        </p:nvSpPr>
-        <p:spPr>
-          <a:xfrm>
-            <a:off x="1583064" y="1491912"/>
-            <a:ext cx="73872" cy="73872"/>
-          </a:xfrm>
-          <a:prstGeom prst="ellipse">
-            <a:avLst/>
-          </a:prstGeom>
-          <a:solidFill>
-            <a:srgbClr val="BD4298"/>
-          </a:solidFill>
-          <a:ln>
-            <a:noFill/>
-          </a:ln>
-        </p:spPr>
-        <p:txBody>
-          <a:bodyPr rtlCol="0" anchor="ctr"/>
-          <a:lstStyle/>
-          <a:p>
-            <a:pPr algn="ctr"/>
-          </a:p>
-        </p:txBody>
-      </p:sp>
-      <p:sp>
-        <p:nvSpPr>
-          <p:cNvPr id="12" name="Rounded Rectangle 11"/>
-          <p:cNvSpPr/>
-          <p:nvPr/>
-        </p:nvSpPr>
-        <p:spPr>
-          <a:xfrm>
-            <a:off x="1602216" y="1564416"/>
-            <a:ext cx="35568" cy="21888"/>
-          </a:xfrm>
-          <a:prstGeom prst="roundRect">
-            <a:avLst>
-              <a:gd name="adj" fmla="val 18750"/>
-            </a:avLst>
-          </a:prstGeom>
-          <a:solidFill>
-            <a:srgbClr val="F1D0E7"/>
-          </a:solidFill>
-          <a:ln>
-            <a:noFill/>
-          </a:ln>
-        </p:spPr>
-        <p:txBody>
-          <a:bodyPr rtlCol="0" anchor="ctr"/>
-          <a:lstStyle/>
-          <a:p>
-            <a:pPr algn="ctr"/>
-          </a:p>
-        </p:txBody>
-      </p:sp>
-      <p:sp>
-        <p:nvSpPr>
-          <p:cNvPr id="13" name="Rounded Rectangle 12"/>
-          <p:cNvSpPr/>
-          <p:nvPr/>
-        </p:nvSpPr>
-        <p:spPr>
-          <a:xfrm>
-            <a:off x="1607688" y="1590408"/>
-            <a:ext cx="24624" cy="12312"/>
-          </a:xfrm>
-          <a:prstGeom prst="roundRect">
-            <a:avLst>
-              <a:gd name="adj" fmla="val 33333"/>
-            </a:avLst>
-          </a:prstGeom>
-          <a:solidFill>
-            <a:srgbClr val="F1D0E7"/>
-          </a:solidFill>
-          <a:ln>
-            <a:noFill/>
-          </a:ln>
-        </p:spPr>
-        <p:txBody>
-          <a:bodyPr rtlCol="0" anchor="ctr"/>
-          <a:lstStyle/>
-          <a:p>
-            <a:pPr algn="ctr"/>
           </a:p>
         </p:txBody>
       </p:sp>
@@ -3529,7 +3560,7 @@
     <p:bg>
       <p:bgPr>
         <a:solidFill>
-          <a:srgbClr val="71285B"/>
+          <a:srgbClr val="00C896"/>
         </a:solidFill>
         <a:effectLst/>
       </p:bgPr>
@@ -3543,277 +3574,14 @@
       <p:grpSpPr/>
       <p:sp>
         <p:nvSpPr>
-          <p:cNvPr id="2" name="Freeform 1"/>
-          <p:cNvSpPr/>
+          <p:cNvPr id="2" name="텍스트"/>
+          <p:cNvSpPr txBox="1"/>
           <p:nvPr/>
         </p:nvSpPr>
         <p:spPr>
           <a:xfrm>
-            <a:off x="2016000" y="576000"/>
-            <a:ext cx="1224000" cy="1224000"/>
-          </a:xfrm>
-          <a:custGeom>
-            <a:avLst/>
-            <a:gdLst/>
-            <a:ahLst/>
-            <a:cxnLst/>
-            <a:rect l="l" t="t" r="r" b="b"/>
-            <a:pathLst>
-              <a:path w="1224000" h="1224000">
-                <a:moveTo>
-                  <a:pt x="1224000" y="1224000"/>
-                </a:moveTo>
-                <a:lnTo>
-                  <a:pt x="0" y="1224000"/>
-                </a:lnTo>
-                <a:lnTo>
-                  <a:pt x="7696" y="1086955"/>
-                </a:lnTo>
-                <a:lnTo>
-                  <a:pt x="30688" y="951634"/>
-                </a:lnTo>
-                <a:lnTo>
-                  <a:pt x="68687" y="819738"/>
-                </a:lnTo>
-                <a:lnTo>
-                  <a:pt x="121214" y="692926"/>
-                </a:lnTo>
-                <a:lnTo>
-                  <a:pt x="187610" y="572793"/>
-                </a:lnTo>
-                <a:lnTo>
-                  <a:pt x="267038" y="460848"/>
-                </a:lnTo>
-                <a:lnTo>
-                  <a:pt x="358501" y="358501"/>
-                </a:lnTo>
-                <a:lnTo>
-                  <a:pt x="460848" y="267038"/>
-                </a:lnTo>
-                <a:lnTo>
-                  <a:pt x="572793" y="187610"/>
-                </a:lnTo>
-                <a:lnTo>
-                  <a:pt x="692926" y="121214"/>
-                </a:lnTo>
-                <a:lnTo>
-                  <a:pt x="819738" y="68687"/>
-                </a:lnTo>
-                <a:lnTo>
-                  <a:pt x="951634" y="30688"/>
-                </a:lnTo>
-                <a:lnTo>
-                  <a:pt x="1086955" y="7696"/>
-                </a:lnTo>
-                <a:lnTo>
-                  <a:pt x="1224000" y="0"/>
-                </a:lnTo>
-                <a:close/>
-              </a:path>
-            </a:pathLst>
-          </a:custGeom>
-          <a:solidFill>
-            <a:srgbClr val="CF77B5"/>
-          </a:solidFill>
-          <a:ln>
-            <a:noFill/>
-          </a:ln>
-        </p:spPr>
-        <p:txBody>
-          <a:bodyPr rtlCol="0" anchor="ctr"/>
-          <a:lstStyle/>
-          <a:p>
-            <a:pPr algn="ctr"/>
-          </a:p>
-        </p:txBody>
-      </p:sp>
-      <p:sp>
-        <p:nvSpPr>
-          <p:cNvPr id="3" name="Freeform 2"/>
-          <p:cNvSpPr/>
-          <p:nvPr/>
-        </p:nvSpPr>
-        <p:spPr>
-          <a:xfrm>
-            <a:off x="2520000" y="1080000"/>
-            <a:ext cx="720000" cy="720000"/>
-          </a:xfrm>
-          <a:custGeom>
-            <a:avLst/>
-            <a:gdLst/>
-            <a:ahLst/>
-            <a:cxnLst/>
-            <a:rect l="l" t="t" r="r" b="b"/>
-            <a:pathLst>
-              <a:path w="720000" h="720000">
-                <a:moveTo>
-                  <a:pt x="720000" y="720000"/>
-                </a:moveTo>
-                <a:lnTo>
-                  <a:pt x="0" y="720000"/>
-                </a:lnTo>
-                <a:lnTo>
-                  <a:pt x="4527" y="639386"/>
-                </a:lnTo>
-                <a:lnTo>
-                  <a:pt x="18052" y="559785"/>
-                </a:lnTo>
-                <a:lnTo>
-                  <a:pt x="40404" y="482199"/>
-                </a:lnTo>
-                <a:lnTo>
-                  <a:pt x="71302" y="407604"/>
-                </a:lnTo>
-                <a:lnTo>
-                  <a:pt x="110359" y="336937"/>
-                </a:lnTo>
-                <a:lnTo>
-                  <a:pt x="157081" y="271087"/>
-                </a:lnTo>
-                <a:lnTo>
-                  <a:pt x="210883" y="210883"/>
-                </a:lnTo>
-                <a:lnTo>
-                  <a:pt x="271087" y="157081"/>
-                </a:lnTo>
-                <a:lnTo>
-                  <a:pt x="336937" y="110359"/>
-                </a:lnTo>
-                <a:lnTo>
-                  <a:pt x="407604" y="71302"/>
-                </a:lnTo>
-                <a:lnTo>
-                  <a:pt x="482199" y="40404"/>
-                </a:lnTo>
-                <a:lnTo>
-                  <a:pt x="559785" y="18052"/>
-                </a:lnTo>
-                <a:lnTo>
-                  <a:pt x="639386" y="4527"/>
-                </a:lnTo>
-                <a:lnTo>
-                  <a:pt x="720000" y="0"/>
-                </a:lnTo>
-                <a:close/>
-              </a:path>
-            </a:pathLst>
-          </a:custGeom>
-          <a:solidFill>
-            <a:srgbClr val="884A75"/>
-          </a:solidFill>
-          <a:ln>
-            <a:noFill/>
-          </a:ln>
-        </p:spPr>
-        <p:txBody>
-          <a:bodyPr rtlCol="0" anchor="ctr"/>
-          <a:lstStyle/>
-          <a:p>
-            <a:pPr algn="ctr"/>
-          </a:p>
-        </p:txBody>
-      </p:sp>
-      <p:sp>
-        <p:nvSpPr>
-          <p:cNvPr id="4" name="Oval 3"/>
-          <p:cNvSpPr/>
-          <p:nvPr/>
-        </p:nvSpPr>
-        <p:spPr>
-          <a:xfrm>
-            <a:off x="2811960" y="1372680"/>
-            <a:ext cx="136080" cy="136080"/>
-          </a:xfrm>
-          <a:prstGeom prst="ellipse">
-            <a:avLst/>
-          </a:prstGeom>
-          <a:solidFill>
-            <a:srgbClr val="FFFFFF"/>
-          </a:solidFill>
-          <a:ln>
-            <a:noFill/>
-          </a:ln>
-        </p:spPr>
-        <p:txBody>
-          <a:bodyPr rtlCol="0" anchor="ctr"/>
-          <a:lstStyle/>
-          <a:p>
-            <a:pPr algn="ctr"/>
-          </a:p>
-        </p:txBody>
-      </p:sp>
-      <p:sp>
-        <p:nvSpPr>
-          <p:cNvPr id="5" name="Rounded Rectangle 4"/>
-          <p:cNvSpPr/>
-          <p:nvPr/>
-        </p:nvSpPr>
-        <p:spPr>
-          <a:xfrm>
-            <a:off x="2847240" y="1506240"/>
-            <a:ext cx="65520" cy="40320"/>
-          </a:xfrm>
-          <a:prstGeom prst="roundRect">
-            <a:avLst>
-              <a:gd name="adj" fmla="val 18749"/>
-            </a:avLst>
-          </a:prstGeom>
-          <a:solidFill>
-            <a:srgbClr val="FFFFFF"/>
-          </a:solidFill>
-          <a:ln>
-            <a:noFill/>
-          </a:ln>
-        </p:spPr>
-        <p:txBody>
-          <a:bodyPr rtlCol="0" anchor="ctr"/>
-          <a:lstStyle/>
-          <a:p>
-            <a:pPr algn="ctr"/>
-          </a:p>
-        </p:txBody>
-      </p:sp>
-      <p:sp>
-        <p:nvSpPr>
-          <p:cNvPr id="6" name="Rounded Rectangle 5"/>
-          <p:cNvSpPr/>
-          <p:nvPr/>
-        </p:nvSpPr>
-        <p:spPr>
-          <a:xfrm>
-            <a:off x="2857320" y="1554120"/>
-            <a:ext cx="45360" cy="22680"/>
-          </a:xfrm>
-          <a:prstGeom prst="roundRect">
-            <a:avLst>
-              <a:gd name="adj" fmla="val 33333"/>
-            </a:avLst>
-          </a:prstGeom>
-          <a:solidFill>
-            <a:srgbClr val="FFFFFF"/>
-          </a:solidFill>
-          <a:ln>
-            <a:noFill/>
-          </a:ln>
-        </p:spPr>
-        <p:txBody>
-          <a:bodyPr rtlCol="0" anchor="ctr"/>
-          <a:lstStyle/>
-          <a:p>
-            <a:pPr algn="ctr"/>
-          </a:p>
-        </p:txBody>
-      </p:sp>
-      <p:sp>
-        <p:nvSpPr>
-          <p:cNvPr id="7" name="텍스트"/>
-          <p:cNvSpPr txBox="1"/>
-          <p:nvPr/>
-        </p:nvSpPr>
-        <p:spPr>
-          <a:xfrm>
-            <a:off x="252000" y="324000"/>
-            <a:ext cx="1944000" cy="720000"/>
+            <a:off x="216000" y="72000"/>
+            <a:ext cx="1080000" cy="936000"/>
           </a:xfrm>
           <a:prstGeom prst="rect">
             <a:avLst/>
@@ -3828,32 +3596,32 @@
           <a:p>
             <a:pPr algn="l">
               <a:lnSpc>
-                <a:spcPts val="1739"/>
+                <a:spcPts val="15950"/>
               </a:lnSpc>
             </a:pPr>
             <a:r>
-              <a:rPr sz="1200" b="1">
+              <a:rPr sz="11000" b="1">
                 <a:solidFill>
-                  <a:srgbClr val="FFFFFF"/>
+                  <a:srgbClr val="12151C"/>
                 </a:solidFill>
                 <a:latin typeface="맑은 고딕"/>
                 <a:ea typeface="맑은 고딕"/>
               </a:rPr>
-              <a:t>차근차근 쌓아 가는 전문성</a:t>
-            </a:r>
-          </a:p>
-        </p:txBody>
-      </p:sp>
-      <p:sp>
-        <p:nvSpPr>
-          <p:cNvPr id="8" name="텍스트"/>
+              <a:t>“</a:t>
+            </a:r>
+          </a:p>
+        </p:txBody>
+      </p:sp>
+      <p:sp>
+        <p:nvSpPr>
+          <p:cNvPr id="3" name="텍스트"/>
           <p:cNvSpPr txBox="1"/>
           <p:nvPr/>
         </p:nvSpPr>
         <p:spPr>
           <a:xfrm>
-            <a:off x="252000" y="1476000"/>
-            <a:ext cx="1440000" cy="108000"/>
+            <a:off x="252000" y="792000"/>
+            <a:ext cx="2520000" cy="648000"/>
           </a:xfrm>
           <a:prstGeom prst="rect">
             <a:avLst/>
@@ -3868,13 +3636,74 @@
           <a:p>
             <a:pPr algn="l">
               <a:lnSpc>
-                <a:spcPts val="1087"/>
+                <a:spcPts val="1812"/>
               </a:lnSpc>
             </a:pPr>
             <a:r>
-              <a:rPr sz="750" b="1" spc="200">
+              <a:rPr sz="1250" b="1">
                 <a:solidFill>
-                  <a:srgbClr val="CDB4C6"/>
+                  <a:srgbClr val="12151C"/>
+                </a:solidFill>
+                <a:latin typeface="맑은 고딕"/>
+                <a:ea typeface="맑은 고딕"/>
+              </a:rPr>
+              <a:t>차근차근 쌓아 가는 전문성</a:t>
+            </a:r>
+          </a:p>
+        </p:txBody>
+      </p:sp>
+      <p:cxnSp>
+        <p:nvCxnSpPr>
+          <p:cNvPr id="4" name="Connector 3"/>
+          <p:cNvCxnSpPr/>
+          <p:nvPr/>
+        </p:nvCxnSpPr>
+        <p:spPr>
+          <a:xfrm>
+            <a:off x="252000" y="1512000"/>
+            <a:ext cx="2736000" cy="0"/>
+          </a:xfrm>
+          <a:prstGeom prst="line">
+            <a:avLst/>
+          </a:prstGeom>
+          <a:ln w="5760">
+            <a:solidFill>
+              <a:srgbClr val="078065"/>
+            </a:solidFill>
+          </a:ln>
+        </p:spPr>
+      </p:cxnSp>
+      <p:sp>
+        <p:nvSpPr>
+          <p:cNvPr id="5" name="텍스트"/>
+          <p:cNvSpPr txBox="1"/>
+          <p:nvPr/>
+        </p:nvSpPr>
+        <p:spPr>
+          <a:xfrm>
+            <a:off x="252000" y="1569600"/>
+            <a:ext cx="2736000" cy="123826"/>
+          </a:xfrm>
+          <a:prstGeom prst="rect">
+            <a:avLst/>
+          </a:prstGeom>
+          <a:noFill/>
+        </p:spPr>
+        <p:txBody>
+          <a:bodyPr wrap="square" lIns="0" rIns="0" tIns="0" bIns="0" anchor="t">
+            <a:spAutoFit/>
+          </a:bodyPr>
+          <a:lstStyle/>
+          <a:p>
+            <a:pPr algn="r">
+              <a:lnSpc>
+                <a:spcPts val="942"/>
+              </a:lnSpc>
+            </a:pPr>
+            <a:r>
+              <a:rPr sz="650" b="1" spc="200">
+                <a:solidFill>
+                  <a:srgbClr val="0E3C37"/>
                 </a:solidFill>
                 <a:latin typeface="맑은 고딕"/>
                 <a:ea typeface="맑은 고딕"/>

--- a/public/fun/cards/office/office-07.pptx
+++ b/public/fun/cards/office/office-07.pptx
@@ -3097,196 +3097,37 @@
         <p:nvPr/>
       </p:nvGrpSpPr>
       <p:grpSpPr/>
-      <p:sp>
-        <p:nvSpPr>
-          <p:cNvPr id="2" name="Oval 1"/>
+      <p:cxnSp>
+        <p:nvCxnSpPr>
+          <p:cNvPr id="2" name="Connector 1"/>
+          <p:cNvCxnSpPr/>
+          <p:nvPr/>
+        </p:nvCxnSpPr>
+        <p:spPr>
+          <a:xfrm>
+            <a:off x="1080000" y="252000"/>
+            <a:ext cx="0" cy="1296000"/>
+          </a:xfrm>
+          <a:prstGeom prst="line">
+            <a:avLst/>
+          </a:prstGeom>
+          <a:ln w="3600">
+            <a:solidFill>
+              <a:srgbClr val="E3E5E9"/>
+            </a:solidFill>
+          </a:ln>
+        </p:spPr>
+      </p:cxnSp>
+      <p:sp>
+        <p:nvSpPr>
+          <p:cNvPr id="3" name="Rectangle 2"/>
           <p:cNvSpPr/>
           <p:nvPr/>
         </p:nvSpPr>
         <p:spPr>
           <a:xfrm>
-            <a:off x="547200" y="475200"/>
-            <a:ext cx="849600" cy="849600"/>
-          </a:xfrm>
-          <a:prstGeom prst="ellipse">
-            <a:avLst/>
-          </a:prstGeom>
-          <a:solidFill>
-            <a:srgbClr val="DBF7F0"/>
-          </a:solidFill>
-          <a:ln>
-            <a:noFill/>
-          </a:ln>
-        </p:spPr>
-        <p:txBody>
-          <a:bodyPr rtlCol="0" anchor="ctr"/>
-          <a:lstStyle/>
-          <a:p>
-            <a:pPr algn="ctr"/>
-          </a:p>
-        </p:txBody>
-      </p:sp>
-      <p:sp>
-        <p:nvSpPr>
-          <p:cNvPr id="3" name="Oval 2"/>
-          <p:cNvSpPr/>
-          <p:nvPr/>
-        </p:nvSpPr>
-        <p:spPr>
-          <a:xfrm>
-            <a:off x="187200" y="475200"/>
-            <a:ext cx="849600" cy="849600"/>
-          </a:xfrm>
-          <a:prstGeom prst="ellipse">
-            <a:avLst/>
-          </a:prstGeom>
-          <a:solidFill>
-            <a:srgbClr val="00C896">
-              <a:alpha val="92000"/>
-            </a:srgbClr>
-          </a:solidFill>
-          <a:ln>
-            <a:noFill/>
-          </a:ln>
-        </p:spPr>
-        <p:txBody>
-          <a:bodyPr rtlCol="0" anchor="ctr"/>
-          <a:lstStyle/>
-          <a:p>
-            <a:pPr algn="ctr"/>
-          </a:p>
-        </p:txBody>
-      </p:sp>
-      <p:sp>
-        <p:nvSpPr>
-          <p:cNvPr id="4" name="텍스트"/>
-          <p:cNvSpPr txBox="1"/>
-          <p:nvPr/>
-        </p:nvSpPr>
-        <p:spPr>
-          <a:xfrm>
-            <a:off x="1692000" y="223200"/>
-            <a:ext cx="1296000" cy="133351"/>
-          </a:xfrm>
-          <a:prstGeom prst="rect">
-            <a:avLst/>
-          </a:prstGeom>
-          <a:noFill/>
-        </p:spPr>
-        <p:txBody>
-          <a:bodyPr wrap="square" lIns="0" rIns="0" tIns="0" bIns="0" anchor="t">
-            <a:spAutoFit/>
-          </a:bodyPr>
-          <a:lstStyle/>
-          <a:p>
-            <a:pPr algn="l">
-              <a:lnSpc>
-                <a:spcPts val="1015"/>
-              </a:lnSpc>
-            </a:pPr>
-            <a:r>
-              <a:rPr sz="700" b="1" spc="200">
-                <a:solidFill>
-                  <a:srgbClr val="6B7280"/>
-                </a:solidFill>
-                <a:latin typeface="맑은 고딕"/>
-                <a:ea typeface="맑은 고딕"/>
-              </a:rPr>
-              <a:t>회사명 · 부서명</a:t>
-            </a:r>
-          </a:p>
-        </p:txBody>
-      </p:sp>
-      <p:sp>
-        <p:nvSpPr>
-          <p:cNvPr id="5" name="텍스트"/>
-          <p:cNvSpPr txBox="1"/>
-          <p:nvPr/>
-        </p:nvSpPr>
-        <p:spPr>
-          <a:xfrm>
-            <a:off x="1692000" y="540000"/>
-            <a:ext cx="1368000" cy="360000"/>
-          </a:xfrm>
-          <a:prstGeom prst="rect">
-            <a:avLst/>
-          </a:prstGeom>
-          <a:noFill/>
-        </p:spPr>
-        <p:txBody>
-          <a:bodyPr wrap="square" lIns="0" rIns="0" tIns="0" bIns="0" anchor="t">
-            <a:spAutoFit/>
-          </a:bodyPr>
-          <a:lstStyle/>
-          <a:p>
-            <a:pPr algn="l">
-              <a:lnSpc>
-                <a:spcPts val="3190"/>
-              </a:lnSpc>
-            </a:pPr>
-            <a:r>
-              <a:rPr sz="2200" b="1">
-                <a:solidFill>
-                  <a:srgbClr val="12151C"/>
-                </a:solidFill>
-                <a:latin typeface="맑은 고딕"/>
-                <a:ea typeface="맑은 고딕"/>
-              </a:rPr>
-              <a:t>조하린</a:t>
-            </a:r>
-          </a:p>
-        </p:txBody>
-      </p:sp>
-      <p:sp>
-        <p:nvSpPr>
-          <p:cNvPr id="6" name="텍스트"/>
-          <p:cNvSpPr txBox="1"/>
-          <p:nvPr/>
-        </p:nvSpPr>
-        <p:spPr>
-          <a:xfrm>
-            <a:off x="1692000" y="943200"/>
-            <a:ext cx="1368000" cy="171451"/>
-          </a:xfrm>
-          <a:prstGeom prst="rect">
-            <a:avLst/>
-          </a:prstGeom>
-          <a:noFill/>
-        </p:spPr>
-        <p:txBody>
-          <a:bodyPr wrap="square" lIns="0" rIns="0" tIns="0" bIns="0" anchor="t">
-            <a:spAutoFit/>
-          </a:bodyPr>
-          <a:lstStyle/>
-          <a:p>
-            <a:pPr algn="l">
-              <a:lnSpc>
-                <a:spcPts val="1305"/>
-              </a:lnSpc>
-            </a:pPr>
-            <a:r>
-              <a:rPr sz="900" b="0">
-                <a:solidFill>
-                  <a:srgbClr val="6B7280"/>
-                </a:solidFill>
-                <a:latin typeface="맑은 고딕"/>
-                <a:ea typeface="맑은 고딕"/>
-              </a:rPr>
-              <a:t>인사팀 책임</a:t>
-            </a:r>
-          </a:p>
-        </p:txBody>
-      </p:sp>
-      <p:sp>
-        <p:nvSpPr>
-          <p:cNvPr id="7" name="Rectangle 6"/>
-          <p:cNvSpPr/>
-          <p:nvPr/>
-        </p:nvSpPr>
-        <p:spPr>
-          <a:xfrm>
-            <a:off x="1692000" y="1195200"/>
-            <a:ext cx="144000" cy="18000"/>
+            <a:off x="1069200" y="252000"/>
+            <a:ext cx="21600" cy="201600"/>
           </a:xfrm>
           <a:prstGeom prst="rect">
             <a:avLst/>
@@ -3308,14 +3149,14 @@
       </p:sp>
       <p:sp>
         <p:nvSpPr>
-          <p:cNvPr id="8" name="텍스트"/>
+          <p:cNvPr id="4" name="텍스트"/>
           <p:cNvSpPr txBox="1"/>
           <p:nvPr/>
         </p:nvSpPr>
         <p:spPr>
           <a:xfrm>
-            <a:off x="1692000" y="1328400"/>
-            <a:ext cx="331200" cy="99061"/>
+            <a:off x="252000" y="252000"/>
+            <a:ext cx="756000" cy="123826"/>
           </a:xfrm>
           <a:prstGeom prst="rect">
             <a:avLst/>
@@ -3330,11 +3171,221 @@
           <a:p>
             <a:pPr algn="l">
               <a:lnSpc>
-                <a:spcPts val="754"/>
+                <a:spcPts val="942"/>
               </a:lnSpc>
             </a:pPr>
             <a:r>
-              <a:rPr sz="520" b="1" spc="120">
+              <a:rPr sz="650" b="1" spc="220">
+                <a:solidFill>
+                  <a:srgbClr val="6B7280"/>
+                </a:solidFill>
+                <a:latin typeface="맑은 고딕"/>
+                <a:ea typeface="맑은 고딕"/>
+              </a:rPr>
+              <a:t>회사명 · 부서명</a:t>
+            </a:r>
+          </a:p>
+        </p:txBody>
+      </p:sp>
+      <p:sp>
+        <p:nvSpPr>
+          <p:cNvPr id="5" name="Oval 4"/>
+          <p:cNvSpPr/>
+          <p:nvPr/>
+        </p:nvSpPr>
+        <p:spPr>
+          <a:xfrm>
+            <a:off x="273600" y="734400"/>
+            <a:ext cx="244800" cy="244800"/>
+          </a:xfrm>
+          <a:prstGeom prst="ellipse">
+            <a:avLst/>
+          </a:prstGeom>
+          <a:noFill/>
+          <a:ln w="5040">
+            <a:solidFill>
+              <a:srgbClr val="00C896"/>
+            </a:solidFill>
+          </a:ln>
+        </p:spPr>
+        <p:txBody>
+          <a:bodyPr rtlCol="0" anchor="ctr"/>
+          <a:lstStyle/>
+          <a:p>
+            <a:pPr algn="ctr"/>
+          </a:p>
+        </p:txBody>
+      </p:sp>
+      <p:sp>
+        <p:nvSpPr>
+          <p:cNvPr id="6" name="텍스트"/>
+          <p:cNvSpPr txBox="1"/>
+          <p:nvPr/>
+        </p:nvSpPr>
+        <p:spPr>
+          <a:xfrm>
+            <a:off x="252000" y="734400"/>
+            <a:ext cx="288000" cy="252000"/>
+          </a:xfrm>
+          <a:prstGeom prst="rect">
+            <a:avLst/>
+          </a:prstGeom>
+          <a:noFill/>
+        </p:spPr>
+        <p:txBody>
+          <a:bodyPr wrap="square" lIns="0" rIns="0" tIns="0" bIns="0" anchor="ctr">
+            <a:spAutoFit/>
+          </a:bodyPr>
+          <a:lstStyle/>
+          <a:p>
+            <a:pPr algn="ctr">
+              <a:lnSpc>
+                <a:spcPts val="1305"/>
+              </a:lnSpc>
+            </a:pPr>
+            <a:r>
+              <a:rPr sz="900" b="1">
+                <a:solidFill>
+                  <a:srgbClr val="00C896"/>
+                </a:solidFill>
+                <a:latin typeface="맑은 고딕"/>
+                <a:ea typeface="맑은 고딕"/>
+              </a:rPr>
+              <a:t>회</a:t>
+            </a:r>
+          </a:p>
+        </p:txBody>
+      </p:sp>
+      <p:sp>
+        <p:nvSpPr>
+          <p:cNvPr id="7" name="텍스트"/>
+          <p:cNvSpPr txBox="1"/>
+          <p:nvPr/>
+        </p:nvSpPr>
+        <p:spPr>
+          <a:xfrm>
+            <a:off x="1260000" y="432000"/>
+            <a:ext cx="1800000" cy="237600"/>
+          </a:xfrm>
+          <a:prstGeom prst="rect">
+            <a:avLst/>
+          </a:prstGeom>
+          <a:noFill/>
+        </p:spPr>
+        <p:txBody>
+          <a:bodyPr wrap="square" lIns="0" rIns="0" tIns="0" bIns="0" anchor="t">
+            <a:spAutoFit/>
+          </a:bodyPr>
+          <a:lstStyle/>
+          <a:p>
+            <a:pPr algn="l">
+              <a:lnSpc>
+                <a:spcPts val="1957"/>
+              </a:lnSpc>
+            </a:pPr>
+            <a:r>
+              <a:rPr sz="1350" b="1" spc="120">
+                <a:solidFill>
+                  <a:srgbClr val="12151C"/>
+                </a:solidFill>
+                <a:latin typeface="맑은 고딕"/>
+                <a:ea typeface="맑은 고딕"/>
+              </a:rPr>
+              <a:t>조하린</a:t>
+            </a:r>
+          </a:p>
+        </p:txBody>
+      </p:sp>
+      <p:sp>
+        <p:nvSpPr>
+          <p:cNvPr id="8" name="텍스트"/>
+          <p:cNvSpPr txBox="1"/>
+          <p:nvPr/>
+        </p:nvSpPr>
+        <p:spPr>
+          <a:xfrm>
+            <a:off x="1260000" y="684000"/>
+            <a:ext cx="1800000" cy="133351"/>
+          </a:xfrm>
+          <a:prstGeom prst="rect">
+            <a:avLst/>
+          </a:prstGeom>
+          <a:noFill/>
+        </p:spPr>
+        <p:txBody>
+          <a:bodyPr wrap="square" lIns="0" rIns="0" tIns="0" bIns="0" anchor="t">
+            <a:spAutoFit/>
+          </a:bodyPr>
+          <a:lstStyle/>
+          <a:p>
+            <a:pPr algn="l">
+              <a:lnSpc>
+                <a:spcPts val="1015"/>
+              </a:lnSpc>
+            </a:pPr>
+            <a:r>
+              <a:rPr sz="700" b="0" spc="60">
+                <a:solidFill>
+                  <a:srgbClr val="6B7280"/>
+                </a:solidFill>
+                <a:latin typeface="맑은 고딕"/>
+                <a:ea typeface="맑은 고딕"/>
+              </a:rPr>
+              <a:t>인사팀 책임</a:t>
+            </a:r>
+          </a:p>
+        </p:txBody>
+      </p:sp>
+      <p:cxnSp>
+        <p:nvCxnSpPr>
+          <p:cNvPr id="9" name="Connector 8"/>
+          <p:cNvCxnSpPr/>
+          <p:nvPr/>
+        </p:nvCxnSpPr>
+        <p:spPr>
+          <a:xfrm>
+            <a:off x="1260000" y="943200"/>
+            <a:ext cx="1728000" cy="0"/>
+          </a:xfrm>
+          <a:prstGeom prst="line">
+            <a:avLst/>
+          </a:prstGeom>
+          <a:ln w="3600">
+            <a:solidFill>
+              <a:srgbClr val="E3E5E9"/>
+            </a:solidFill>
+          </a:ln>
+        </p:spPr>
+      </p:cxnSp>
+      <p:sp>
+        <p:nvSpPr>
+          <p:cNvPr id="10" name="텍스트"/>
+          <p:cNvSpPr txBox="1"/>
+          <p:nvPr/>
+        </p:nvSpPr>
+        <p:spPr>
+          <a:xfrm>
+            <a:off x="1260000" y="1054800"/>
+            <a:ext cx="331200" cy="91441"/>
+          </a:xfrm>
+          <a:prstGeom prst="rect">
+            <a:avLst/>
+          </a:prstGeom>
+          <a:noFill/>
+        </p:spPr>
+        <p:txBody>
+          <a:bodyPr wrap="square" lIns="0" rIns="0" tIns="0" bIns="0" anchor="t">
+            <a:spAutoFit/>
+          </a:bodyPr>
+          <a:lstStyle/>
+          <a:p>
+            <a:pPr algn="l">
+              <a:lnSpc>
+                <a:spcPts val="696"/>
+              </a:lnSpc>
+            </a:pPr>
+            <a:r>
+              <a:rPr sz="480" b="1" spc="140">
                 <a:solidFill>
                   <a:srgbClr val="6B7280"/>
                 </a:solidFill>
@@ -3348,14 +3399,14 @@
       </p:sp>
       <p:sp>
         <p:nvSpPr>
-          <p:cNvPr id="9" name="텍스트"/>
+          <p:cNvPr id="11" name="텍스트"/>
           <p:cNvSpPr txBox="1"/>
           <p:nvPr/>
         </p:nvSpPr>
         <p:spPr>
           <a:xfrm>
-            <a:off x="2023200" y="1317600"/>
-            <a:ext cx="1188000" cy="125731"/>
+            <a:off x="1591200" y="1044000"/>
+            <a:ext cx="1188000" cy="123826"/>
           </a:xfrm>
           <a:prstGeom prst="rect">
             <a:avLst/>
@@ -3370,11 +3421,11 @@
           <a:p>
             <a:pPr algn="l">
               <a:lnSpc>
-                <a:spcPts val="956"/>
+                <a:spcPts val="942"/>
               </a:lnSpc>
             </a:pPr>
             <a:r>
-              <a:rPr sz="660" b="0">
+              <a:rPr sz="650" b="0">
                 <a:solidFill>
                   <a:srgbClr val="12151C"/>
                 </a:solidFill>
@@ -3388,14 +3439,14 @@
       </p:sp>
       <p:sp>
         <p:nvSpPr>
-          <p:cNvPr id="10" name="텍스트"/>
+          <p:cNvPr id="12" name="텍스트"/>
           <p:cNvSpPr txBox="1"/>
           <p:nvPr/>
         </p:nvSpPr>
         <p:spPr>
           <a:xfrm>
-            <a:off x="1692000" y="1458000"/>
-            <a:ext cx="331200" cy="99061"/>
+            <a:off x="1260000" y="1184400"/>
+            <a:ext cx="331200" cy="91441"/>
           </a:xfrm>
           <a:prstGeom prst="rect">
             <a:avLst/>
@@ -3410,11 +3461,11 @@
           <a:p>
             <a:pPr algn="l">
               <a:lnSpc>
-                <a:spcPts val="754"/>
+                <a:spcPts val="696"/>
               </a:lnSpc>
             </a:pPr>
             <a:r>
-              <a:rPr sz="520" b="1" spc="120">
+              <a:rPr sz="480" b="1" spc="140">
                 <a:solidFill>
                   <a:srgbClr val="6B7280"/>
                 </a:solidFill>
@@ -3428,14 +3479,14 @@
       </p:sp>
       <p:sp>
         <p:nvSpPr>
-          <p:cNvPr id="11" name="텍스트"/>
+          <p:cNvPr id="13" name="텍스트"/>
           <p:cNvSpPr txBox="1"/>
           <p:nvPr/>
         </p:nvSpPr>
         <p:spPr>
           <a:xfrm>
-            <a:off x="2023200" y="1447200"/>
-            <a:ext cx="1188000" cy="125731"/>
+            <a:off x="1591200" y="1173600"/>
+            <a:ext cx="1188000" cy="123826"/>
           </a:xfrm>
           <a:prstGeom prst="rect">
             <a:avLst/>
@@ -3450,11 +3501,11 @@
           <a:p>
             <a:pPr algn="l">
               <a:lnSpc>
-                <a:spcPts val="956"/>
+                <a:spcPts val="942"/>
               </a:lnSpc>
             </a:pPr>
             <a:r>
-              <a:rPr sz="660" b="0">
+              <a:rPr sz="650" b="0">
                 <a:solidFill>
                   <a:srgbClr val="12151C"/>
                 </a:solidFill>
@@ -3468,14 +3519,14 @@
       </p:sp>
       <p:sp>
         <p:nvSpPr>
-          <p:cNvPr id="12" name="텍스트"/>
+          <p:cNvPr id="14" name="텍스트"/>
           <p:cNvSpPr txBox="1"/>
           <p:nvPr/>
         </p:nvSpPr>
         <p:spPr>
           <a:xfrm>
-            <a:off x="1692000" y="1587600"/>
-            <a:ext cx="331200" cy="99061"/>
+            <a:off x="1260000" y="1314000"/>
+            <a:ext cx="331200" cy="91441"/>
           </a:xfrm>
           <a:prstGeom prst="rect">
             <a:avLst/>
@@ -3490,11 +3541,11 @@
           <a:p>
             <a:pPr algn="l">
               <a:lnSpc>
-                <a:spcPts val="754"/>
+                <a:spcPts val="696"/>
               </a:lnSpc>
             </a:pPr>
             <a:r>
-              <a:rPr sz="520" b="1" spc="120">
+              <a:rPr sz="480" b="1" spc="140">
                 <a:solidFill>
                   <a:srgbClr val="6B7280"/>
                 </a:solidFill>
@@ -3508,14 +3559,14 @@
       </p:sp>
       <p:sp>
         <p:nvSpPr>
-          <p:cNvPr id="13" name="텍스트"/>
+          <p:cNvPr id="15" name="텍스트"/>
           <p:cNvSpPr txBox="1"/>
           <p:nvPr/>
         </p:nvSpPr>
         <p:spPr>
           <a:xfrm>
-            <a:off x="2023200" y="1576800"/>
-            <a:ext cx="1188000" cy="125731"/>
+            <a:off x="1591200" y="1303200"/>
+            <a:ext cx="1188000" cy="123826"/>
           </a:xfrm>
           <a:prstGeom prst="rect">
             <a:avLst/>
@@ -3530,11 +3581,11 @@
           <a:p>
             <a:pPr algn="l">
               <a:lnSpc>
-                <a:spcPts val="956"/>
+                <a:spcPts val="942"/>
               </a:lnSpc>
             </a:pPr>
             <a:r>
-              <a:rPr sz="660" b="0">
+              <a:rPr sz="650" b="0">
                 <a:solidFill>
                   <a:srgbClr val="12151C"/>
                 </a:solidFill>
@@ -3574,19 +3625,79 @@
       <p:grpSpPr/>
       <p:sp>
         <p:nvSpPr>
-          <p:cNvPr id="2" name="텍스트"/>
-          <p:cNvSpPr txBox="1"/>
+          <p:cNvPr id="2" name="Rectangle 1"/>
+          <p:cNvSpPr/>
           <p:nvPr/>
         </p:nvSpPr>
         <p:spPr>
           <a:xfrm>
-            <a:off x="216000" y="72000"/>
-            <a:ext cx="1080000" cy="936000"/>
+            <a:off x="0" y="0"/>
+            <a:ext cx="3240000" cy="1800000"/>
+          </a:xfrm>
+          <a:prstGeom prst="rect">
+            <a:avLst/>
+          </a:prstGeom>
+          <a:solidFill>
+            <a:srgbClr val="33D3AB"/>
+          </a:solidFill>
+          <a:ln>
+            <a:noFill/>
+          </a:ln>
+        </p:spPr>
+        <p:txBody>
+          <a:bodyPr rtlCol="0" anchor="ctr"/>
+          <a:lstStyle/>
+          <a:p>
+            <a:pPr algn="ctr"/>
+          </a:p>
+        </p:txBody>
+      </p:sp>
+      <p:sp>
+        <p:nvSpPr>
+          <p:cNvPr id="3" name="Rectangle 2"/>
+          <p:cNvSpPr/>
+          <p:nvPr/>
+        </p:nvSpPr>
+        <p:spPr>
+          <a:xfrm>
+            <a:off x="108000" y="108000"/>
+            <a:ext cx="3024000" cy="1584000"/>
           </a:xfrm>
           <a:prstGeom prst="rect">
             <a:avLst/>
           </a:prstGeom>
           <a:noFill/>
+          <a:ln w="3600">
+            <a:solidFill>
+              <a:srgbClr val="12151C">
+                <a:alpha val="50000"/>
+              </a:srgbClr>
+            </a:solidFill>
+          </a:ln>
+        </p:spPr>
+        <p:txBody>
+          <a:bodyPr rtlCol="0" anchor="ctr"/>
+          <a:lstStyle/>
+          <a:p>
+            <a:pPr algn="ctr"/>
+          </a:p>
+        </p:txBody>
+      </p:sp>
+      <p:sp>
+        <p:nvSpPr>
+          <p:cNvPr id="4" name="텍스트"/>
+          <p:cNvSpPr txBox="1"/>
+          <p:nvPr/>
+        </p:nvSpPr>
+        <p:spPr>
+          <a:xfrm>
+            <a:off x="288000" y="280800"/>
+            <a:ext cx="1440000" cy="99061"/>
+          </a:xfrm>
+          <a:prstGeom prst="rect">
+            <a:avLst/>
+          </a:prstGeom>
+          <a:noFill/>
         </p:spPr>
         <p:txBody>
           <a:bodyPr wrap="square" lIns="0" rIns="0" tIns="0" bIns="0" anchor="t">
@@ -3596,32 +3707,32 @@
           <a:p>
             <a:pPr algn="l">
               <a:lnSpc>
-                <a:spcPts val="15950"/>
+                <a:spcPts val="754"/>
               </a:lnSpc>
             </a:pPr>
             <a:r>
-              <a:rPr sz="11000" b="1">
+              <a:rPr sz="520" b="1" spc="240">
                 <a:solidFill>
                   <a:srgbClr val="12151C"/>
                 </a:solidFill>
                 <a:latin typeface="맑은 고딕"/>
                 <a:ea typeface="맑은 고딕"/>
               </a:rPr>
-              <a:t>“</a:t>
-            </a:r>
-          </a:p>
-        </p:txBody>
-      </p:sp>
-      <p:sp>
-        <p:nvSpPr>
-          <p:cNvPr id="3" name="텍스트"/>
+              <a:t>담당 업무</a:t>
+            </a:r>
+          </a:p>
+        </p:txBody>
+      </p:sp>
+      <p:sp>
+        <p:nvSpPr>
+          <p:cNvPr id="5" name="텍스트"/>
           <p:cNvSpPr txBox="1"/>
           <p:nvPr/>
         </p:nvSpPr>
         <p:spPr>
           <a:xfrm>
-            <a:off x="252000" y="792000"/>
-            <a:ext cx="2520000" cy="648000"/>
+            <a:off x="288000" y="468000"/>
+            <a:ext cx="1872000" cy="216000"/>
           </a:xfrm>
           <a:prstGeom prst="rect">
             <a:avLst/>
@@ -3636,53 +3747,53 @@
           <a:p>
             <a:pPr algn="l">
               <a:lnSpc>
-                <a:spcPts val="1812"/>
+                <a:spcPts val="1377"/>
               </a:lnSpc>
             </a:pPr>
             <a:r>
-              <a:rPr sz="1250" b="1">
+              <a:rPr sz="950" b="1">
                 <a:solidFill>
                   <a:srgbClr val="12151C"/>
                 </a:solidFill>
                 <a:latin typeface="맑은 고딕"/>
                 <a:ea typeface="맑은 고딕"/>
               </a:rPr>
-              <a:t>차근차근 쌓아 가는 전문성</a:t>
+              <a:t>영업 관리</a:t>
             </a:r>
           </a:p>
         </p:txBody>
       </p:sp>
       <p:cxnSp>
         <p:nvCxnSpPr>
-          <p:cNvPr id="4" name="Connector 3"/>
+          <p:cNvPr id="6" name="Connector 5"/>
           <p:cNvCxnSpPr/>
           <p:nvPr/>
         </p:nvCxnSpPr>
         <p:spPr>
           <a:xfrm>
-            <a:off x="252000" y="1512000"/>
-            <a:ext cx="2736000" cy="0"/>
+            <a:off x="288000" y="669600"/>
+            <a:ext cx="1728000" cy="0"/>
           </a:xfrm>
           <a:prstGeom prst="line">
             <a:avLst/>
           </a:prstGeom>
-          <a:ln w="5760">
+          <a:ln w="3600">
             <a:solidFill>
-              <a:srgbClr val="078065"/>
+              <a:srgbClr val="12151C"/>
             </a:solidFill>
           </a:ln>
         </p:spPr>
       </p:cxnSp>
       <p:sp>
         <p:nvSpPr>
-          <p:cNvPr id="5" name="텍스트"/>
+          <p:cNvPr id="7" name="텍스트"/>
           <p:cNvSpPr txBox="1"/>
           <p:nvPr/>
         </p:nvSpPr>
         <p:spPr>
           <a:xfrm>
-            <a:off x="252000" y="1569600"/>
-            <a:ext cx="2736000" cy="123826"/>
+            <a:off x="288000" y="691200"/>
+            <a:ext cx="1872000" cy="216000"/>
           </a:xfrm>
           <a:prstGeom prst="rect">
             <a:avLst/>
@@ -3695,15 +3806,362 @@
           </a:bodyPr>
           <a:lstStyle/>
           <a:p>
-            <a:pPr algn="r">
+            <a:pPr algn="l">
+              <a:lnSpc>
+                <a:spcPts val="1377"/>
+              </a:lnSpc>
+            </a:pPr>
+            <a:r>
+              <a:rPr sz="950" b="1">
+                <a:solidFill>
+                  <a:srgbClr val="12151C"/>
+                </a:solidFill>
+                <a:latin typeface="맑은 고딕"/>
+                <a:ea typeface="맑은 고딕"/>
+              </a:rPr>
+              <a:t>마케팅</a:t>
+            </a:r>
+          </a:p>
+        </p:txBody>
+      </p:sp>
+      <p:cxnSp>
+        <p:nvCxnSpPr>
+          <p:cNvPr id="8" name="Connector 7"/>
+          <p:cNvCxnSpPr/>
+          <p:nvPr/>
+        </p:nvCxnSpPr>
+        <p:spPr>
+          <a:xfrm>
+            <a:off x="288000" y="892800"/>
+            <a:ext cx="1728000" cy="0"/>
+          </a:xfrm>
+          <a:prstGeom prst="line">
+            <a:avLst/>
+          </a:prstGeom>
+          <a:ln w="3600">
+            <a:solidFill>
+              <a:srgbClr val="12151C"/>
+            </a:solidFill>
+          </a:ln>
+        </p:spPr>
+      </p:cxnSp>
+      <p:sp>
+        <p:nvSpPr>
+          <p:cNvPr id="9" name="텍스트"/>
+          <p:cNvSpPr txBox="1"/>
+          <p:nvPr/>
+        </p:nvSpPr>
+        <p:spPr>
+          <a:xfrm>
+            <a:off x="288000" y="914400"/>
+            <a:ext cx="1872000" cy="216000"/>
+          </a:xfrm>
+          <a:prstGeom prst="rect">
+            <a:avLst/>
+          </a:prstGeom>
+          <a:noFill/>
+        </p:spPr>
+        <p:txBody>
+          <a:bodyPr wrap="square" lIns="0" rIns="0" tIns="0" bIns="0" anchor="t">
+            <a:spAutoFit/>
+          </a:bodyPr>
+          <a:lstStyle/>
+          <a:p>
+            <a:pPr algn="l">
+              <a:lnSpc>
+                <a:spcPts val="1377"/>
+              </a:lnSpc>
+            </a:pPr>
+            <a:r>
+              <a:rPr sz="950" b="1">
+                <a:solidFill>
+                  <a:srgbClr val="12151C"/>
+                </a:solidFill>
+                <a:latin typeface="맑은 고딕"/>
+                <a:ea typeface="맑은 고딕"/>
+              </a:rPr>
+              <a:t>서비스 기획</a:t>
+            </a:r>
+          </a:p>
+        </p:txBody>
+      </p:sp>
+      <p:cxnSp>
+        <p:nvCxnSpPr>
+          <p:cNvPr id="10" name="Connector 9"/>
+          <p:cNvCxnSpPr/>
+          <p:nvPr/>
+        </p:nvCxnSpPr>
+        <p:spPr>
+          <a:xfrm>
+            <a:off x="288000" y="1116000"/>
+            <a:ext cx="1728000" cy="0"/>
+          </a:xfrm>
+          <a:prstGeom prst="line">
+            <a:avLst/>
+          </a:prstGeom>
+          <a:ln w="3600">
+            <a:solidFill>
+              <a:srgbClr val="12151C"/>
+            </a:solidFill>
+          </a:ln>
+        </p:spPr>
+      </p:cxnSp>
+      <p:sp>
+        <p:nvSpPr>
+          <p:cNvPr id="11" name="텍스트"/>
+          <p:cNvSpPr txBox="1"/>
+          <p:nvPr/>
+        </p:nvSpPr>
+        <p:spPr>
+          <a:xfrm>
+            <a:off x="288000" y="1137600"/>
+            <a:ext cx="1872000" cy="216000"/>
+          </a:xfrm>
+          <a:prstGeom prst="rect">
+            <a:avLst/>
+          </a:prstGeom>
+          <a:noFill/>
+        </p:spPr>
+        <p:txBody>
+          <a:bodyPr wrap="square" lIns="0" rIns="0" tIns="0" bIns="0" anchor="t">
+            <a:spAutoFit/>
+          </a:bodyPr>
+          <a:lstStyle/>
+          <a:p>
+            <a:pPr algn="l">
+              <a:lnSpc>
+                <a:spcPts val="1377"/>
+              </a:lnSpc>
+            </a:pPr>
+            <a:r>
+              <a:rPr sz="950" b="1">
+                <a:solidFill>
+                  <a:srgbClr val="12151C"/>
+                </a:solidFill>
+                <a:latin typeface="맑은 고딕"/>
+                <a:ea typeface="맑은 고딕"/>
+              </a:rPr>
+              <a:t>계약 관리</a:t>
+            </a:r>
+          </a:p>
+        </p:txBody>
+      </p:sp>
+      <p:cxnSp>
+        <p:nvCxnSpPr>
+          <p:cNvPr id="12" name="Connector 11"/>
+          <p:cNvCxnSpPr/>
+          <p:nvPr/>
+        </p:nvCxnSpPr>
+        <p:spPr>
+          <a:xfrm>
+            <a:off x="288000" y="1339200"/>
+            <a:ext cx="1728000" cy="0"/>
+          </a:xfrm>
+          <a:prstGeom prst="line">
+            <a:avLst/>
+          </a:prstGeom>
+          <a:ln w="3600">
+            <a:solidFill>
+              <a:srgbClr val="12151C"/>
+            </a:solidFill>
+          </a:ln>
+        </p:spPr>
+      </p:cxnSp>
+      <p:sp>
+        <p:nvSpPr>
+          <p:cNvPr id="13" name="텍스트"/>
+          <p:cNvSpPr txBox="1"/>
+          <p:nvPr/>
+        </p:nvSpPr>
+        <p:spPr>
+          <a:xfrm>
+            <a:off x="2268000" y="468000"/>
+            <a:ext cx="864000" cy="91441"/>
+          </a:xfrm>
+          <a:prstGeom prst="rect">
+            <a:avLst/>
+          </a:prstGeom>
+          <a:noFill/>
+        </p:spPr>
+        <p:txBody>
+          <a:bodyPr wrap="square" lIns="0" rIns="0" tIns="0" bIns="0" anchor="t">
+            <a:spAutoFit/>
+          </a:bodyPr>
+          <a:lstStyle/>
+          <a:p>
+            <a:pPr algn="l">
+              <a:lnSpc>
+                <a:spcPts val="696"/>
+              </a:lnSpc>
+            </a:pPr>
+            <a:r>
+              <a:rPr sz="480" b="1" spc="140">
+                <a:solidFill>
+                  <a:srgbClr val="12151C">
+                    <a:alpha val="75000"/>
+                  </a:srgbClr>
+                </a:solidFill>
+                <a:latin typeface="맑은 고딕"/>
+                <a:ea typeface="맑은 고딕"/>
+              </a:rPr>
+              <a:t>HOURS</a:t>
+            </a:r>
+          </a:p>
+        </p:txBody>
+      </p:sp>
+      <p:sp>
+        <p:nvSpPr>
+          <p:cNvPr id="14" name="텍스트"/>
+          <p:cNvSpPr txBox="1"/>
+          <p:nvPr/>
+        </p:nvSpPr>
+        <p:spPr>
+          <a:xfrm>
+            <a:off x="2268000" y="576000"/>
+            <a:ext cx="864000" cy="118111"/>
+          </a:xfrm>
+          <a:prstGeom prst="rect">
+            <a:avLst/>
+          </a:prstGeom>
+          <a:noFill/>
+        </p:spPr>
+        <p:txBody>
+          <a:bodyPr wrap="square" lIns="0" rIns="0" tIns="0" bIns="0" anchor="t">
+            <a:spAutoFit/>
+          </a:bodyPr>
+          <a:lstStyle/>
+          <a:p>
+            <a:pPr algn="l">
+              <a:lnSpc>
+                <a:spcPts val="899"/>
+              </a:lnSpc>
+            </a:pPr>
+            <a:r>
+              <a:rPr sz="620" b="1">
+                <a:solidFill>
+                  <a:srgbClr val="12151C"/>
+                </a:solidFill>
+                <a:latin typeface="맑은 고딕"/>
+                <a:ea typeface="맑은 고딕"/>
+              </a:rPr>
+              <a:t>평일 09:00 – 18:00</a:t>
+            </a:r>
+          </a:p>
+        </p:txBody>
+      </p:sp>
+      <p:sp>
+        <p:nvSpPr>
+          <p:cNvPr id="15" name="텍스트"/>
+          <p:cNvSpPr txBox="1"/>
+          <p:nvPr/>
+        </p:nvSpPr>
+        <p:spPr>
+          <a:xfrm>
+            <a:off x="2268000" y="900000"/>
+            <a:ext cx="864000" cy="91441"/>
+          </a:xfrm>
+          <a:prstGeom prst="rect">
+            <a:avLst/>
+          </a:prstGeom>
+          <a:noFill/>
+        </p:spPr>
+        <p:txBody>
+          <a:bodyPr wrap="square" lIns="0" rIns="0" tIns="0" bIns="0" anchor="t">
+            <a:spAutoFit/>
+          </a:bodyPr>
+          <a:lstStyle/>
+          <a:p>
+            <a:pPr algn="l">
+              <a:lnSpc>
+                <a:spcPts val="696"/>
+              </a:lnSpc>
+            </a:pPr>
+            <a:r>
+              <a:rPr sz="480" b="1" spc="140">
+                <a:solidFill>
+                  <a:srgbClr val="12151C">
+                    <a:alpha val="75000"/>
+                  </a:srgbClr>
+                </a:solidFill>
+                <a:latin typeface="맑은 고딕"/>
+                <a:ea typeface="맑은 고딕"/>
+              </a:rPr>
+              <a:t>WEB</a:t>
+            </a:r>
+          </a:p>
+        </p:txBody>
+      </p:sp>
+      <p:sp>
+        <p:nvSpPr>
+          <p:cNvPr id="16" name="텍스트"/>
+          <p:cNvSpPr txBox="1"/>
+          <p:nvPr/>
+        </p:nvSpPr>
+        <p:spPr>
+          <a:xfrm>
+            <a:off x="2268000" y="1008000"/>
+            <a:ext cx="864000" cy="118111"/>
+          </a:xfrm>
+          <a:prstGeom prst="rect">
+            <a:avLst/>
+          </a:prstGeom>
+          <a:noFill/>
+        </p:spPr>
+        <p:txBody>
+          <a:bodyPr wrap="square" lIns="0" rIns="0" tIns="0" bIns="0" anchor="t">
+            <a:spAutoFit/>
+          </a:bodyPr>
+          <a:lstStyle/>
+          <a:p>
+            <a:pPr algn="l">
+              <a:lnSpc>
+                <a:spcPts val="899"/>
+              </a:lnSpc>
+            </a:pPr>
+            <a:r>
+              <a:rPr sz="620" b="1">
+                <a:solidFill>
+                  <a:srgbClr val="12151C"/>
+                </a:solidFill>
+                <a:latin typeface="맑은 고딕"/>
+                <a:ea typeface="맑은 고딕"/>
+              </a:rPr>
+              <a:t>www.example.com</a:t>
+            </a:r>
+          </a:p>
+        </p:txBody>
+      </p:sp>
+      <p:sp>
+        <p:nvSpPr>
+          <p:cNvPr id="17" name="텍스트"/>
+          <p:cNvSpPr txBox="1"/>
+          <p:nvPr/>
+        </p:nvSpPr>
+        <p:spPr>
+          <a:xfrm>
+            <a:off x="288000" y="1512000"/>
+            <a:ext cx="1800000" cy="123826"/>
+          </a:xfrm>
+          <a:prstGeom prst="rect">
+            <a:avLst/>
+          </a:prstGeom>
+          <a:noFill/>
+        </p:spPr>
+        <p:txBody>
+          <a:bodyPr wrap="square" lIns="0" rIns="0" tIns="0" bIns="0" anchor="t">
+            <a:spAutoFit/>
+          </a:bodyPr>
+          <a:lstStyle/>
+          <a:p>
+            <a:pPr algn="l">
               <a:lnSpc>
                 <a:spcPts val="942"/>
               </a:lnSpc>
             </a:pPr>
             <a:r>
-              <a:rPr sz="650" b="1" spc="200">
+              <a:rPr sz="650" b="1" spc="220">
                 <a:solidFill>
-                  <a:srgbClr val="0E3C37"/>
+                  <a:srgbClr val="12151C"/>
                 </a:solidFill>
                 <a:latin typeface="맑은 고딕"/>
                 <a:ea typeface="맑은 고딕"/>
